--- a/03_Shared/05_Workshop_Presentations/ECS_HAM_Workshop_Modernizing_the_Core.pptx
+++ b/03_Shared/05_Workshop_Presentations/ECS_HAM_Workshop_Modernizing_the_Core.pptx
@@ -13003,6 +13003,10 @@
             <a:prstDash val="solid"/>
           </a:ln>
         </p:spPr>
+        <p:txBody>
+          <a:bodyPr/>
+          <a:p/>
+        </p:txBody>
       </p:sp>
       <p:sp>
         <p:nvSpPr>
@@ -13173,6 +13177,10 @@
             <a:prstDash val="solid"/>
           </a:ln>
         </p:spPr>
+        <p:txBody>
+          <a:bodyPr/>
+          <a:p/>
+        </p:txBody>
       </p:sp>
       <p:sp>
         <p:nvSpPr>
@@ -13198,6 +13206,10 @@
             <a:prstDash val="solid"/>
           </a:ln>
         </p:spPr>
+        <p:txBody>
+          <a:bodyPr/>
+          <a:p/>
+        </p:txBody>
       </p:sp>
       <p:sp>
         <p:nvSpPr>
@@ -13259,6 +13271,10 @@
             <a:prstDash val="solid"/>
           </a:ln>
         </p:spPr>
+        <p:txBody>
+          <a:bodyPr/>
+          <a:p/>
+        </p:txBody>
       </p:sp>
       <p:sp>
         <p:nvSpPr>
@@ -13281,140 +13297,144 @@
           <a:bodyPr wrap="square" rtlCol="0" anchor="t"/>
           <a:lstStyle/>
           <a:p>
-            <a:pPr indent="0" marL="0">
-              <a:buNone/>
-            </a:pPr>
-            <a:r>
-              <a:rPr lang="en-US" sz="1100" dirty="0">
-                <a:solidFill>
-                  <a:srgbClr val="334155"/>
-                </a:solidFill>
-                <a:latin typeface="Calibri" pitchFamily="34" charset="0"/>
-                <a:ea typeface="Calibri" pitchFamily="34" charset="-122"/>
-                <a:cs typeface="Calibri" pitchFamily="34" charset="-120"/>
-              </a:rPr>
-              <a:t>✓  Activating and configuring OOTB features</a:t>
-            </a:r>
-            <a:endParaRPr lang="en-US" sz="1100" dirty="0"/>
-          </a:p>
-          <a:p>
-            <a:pPr indent="0" marL="0">
-              <a:buNone/>
-            </a:pPr>
-            <a:r>
-              <a:rPr lang="en-US" sz="1100" dirty="0">
-                <a:solidFill>
-                  <a:srgbClr val="334155"/>
-                </a:solidFill>
-                <a:latin typeface="Calibri" pitchFamily="34" charset="0"/>
-                <a:ea typeface="Calibri" pitchFamily="34" charset="-122"/>
-                <a:cs typeface="Calibri" pitchFamily="34" charset="-120"/>
-              </a:rPr>
-              <a:t>✓  Setting up categories and taxonomies</a:t>
-            </a:r>
-            <a:endParaRPr lang="en-US" sz="1100" dirty="0"/>
-          </a:p>
-          <a:p>
-            <a:pPr indent="0" marL="0">
-              <a:buNone/>
-            </a:pPr>
-            <a:r>
-              <a:rPr lang="en-US" sz="1100" dirty="0">
-                <a:solidFill>
-                  <a:srgbClr val="334155"/>
-                </a:solidFill>
-                <a:latin typeface="Calibri" pitchFamily="34" charset="0"/>
-                <a:ea typeface="Calibri" pitchFamily="34" charset="-122"/>
-                <a:cs typeface="Calibri" pitchFamily="34" charset="-120"/>
-              </a:rPr>
-              <a:t>✓  Building assignment rules and routing logic</a:t>
-            </a:r>
-            <a:endParaRPr lang="en-US" sz="1100" dirty="0"/>
-          </a:p>
-          <a:p>
-            <a:pPr indent="0" marL="0">
-              <a:buNone/>
-            </a:pPr>
-            <a:r>
-              <a:rPr lang="en-US" sz="1100" dirty="0">
-                <a:solidFill>
-                  <a:srgbClr val="334155"/>
-                </a:solidFill>
-                <a:latin typeface="Calibri" pitchFamily="34" charset="0"/>
-                <a:ea typeface="Calibri" pitchFamily="34" charset="-122"/>
-                <a:cs typeface="Calibri" pitchFamily="34" charset="-120"/>
-              </a:rPr>
-              <a:t>✓  Defining SLA targets and schedules</a:t>
-            </a:r>
-            <a:endParaRPr lang="en-US" sz="1100" dirty="0"/>
-          </a:p>
-          <a:p>
-            <a:pPr indent="0" marL="0">
-              <a:buNone/>
-            </a:pPr>
-            <a:r>
-              <a:rPr lang="en-US" sz="1100" dirty="0">
-                <a:solidFill>
-                  <a:srgbClr val="334155"/>
-                </a:solidFill>
-                <a:latin typeface="Calibri" pitchFamily="34" charset="0"/>
-                <a:ea typeface="Calibri" pitchFamily="34" charset="-122"/>
-                <a:cs typeface="Calibri" pitchFamily="34" charset="-120"/>
-              </a:rPr>
-              <a:t>✓  Configuring notifications and email templates</a:t>
-            </a:r>
-            <a:endParaRPr lang="en-US" sz="1100" dirty="0"/>
-          </a:p>
-          <a:p>
-            <a:pPr indent="0" marL="0">
-              <a:buNone/>
-            </a:pPr>
-            <a:r>
-              <a:rPr lang="en-US" sz="1100" dirty="0">
-                <a:solidFill>
-                  <a:srgbClr val="334155"/>
-                </a:solidFill>
-                <a:latin typeface="Calibri" pitchFamily="34" charset="0"/>
-                <a:ea typeface="Calibri" pitchFamily="34" charset="-122"/>
-                <a:cs typeface="Calibri" pitchFamily="34" charset="-120"/>
-              </a:rPr>
-              <a:t>✓  Enabling AI features (PI, Now Assist, Virtual Agent)</a:t>
-            </a:r>
-            <a:endParaRPr lang="en-US" sz="1100" dirty="0"/>
-          </a:p>
-          <a:p>
-            <a:pPr indent="0" marL="0">
-              <a:buNone/>
-            </a:pPr>
-            <a:r>
-              <a:rPr lang="en-US" sz="1100" dirty="0">
-                <a:solidFill>
-                  <a:srgbClr val="334155"/>
-                </a:solidFill>
-                <a:latin typeface="Calibri" pitchFamily="34" charset="0"/>
-                <a:ea typeface="Calibri" pitchFamily="34" charset="-122"/>
-                <a:cs typeface="Calibri" pitchFamily="34" charset="-120"/>
-              </a:rPr>
-              <a:t>✓  Building reports and PA indicators</a:t>
-            </a:r>
-            <a:endParaRPr lang="en-US" sz="1100" dirty="0"/>
-          </a:p>
-          <a:p>
-            <a:pPr indent="0" marL="0">
-              <a:buNone/>
-            </a:pPr>
-            <a:r>
-              <a:rPr lang="en-US" sz="1100" dirty="0">
-                <a:solidFill>
-                  <a:srgbClr val="334155"/>
-                </a:solidFill>
-                <a:latin typeface="Calibri" pitchFamily="34" charset="0"/>
-                <a:ea typeface="Calibri" pitchFamily="34" charset="-122"/>
-                <a:cs typeface="Calibri" pitchFamily="34" charset="-120"/>
-              </a:rPr>
-              <a:t>✓  Setting system properties and thresholds</a:t>
-            </a:r>
-            <a:endParaRPr lang="en-US" sz="1100" dirty="0"/>
+            <a:r>
+              <a:rPr lang="en-US" dirty="0" sz="1100">
+                <a:solidFill>
+                  <a:srgbClr val="16A34A"/>
+                </a:solidFill>
+                <a:latin typeface="Calibri"/>
+              </a:rPr>
+              <a:t>✓  </a:t>
+            </a:r>
+            <a:r>
+              <a:rPr lang="en-US" dirty="0" sz="1100">
+                <a:solidFill>
+                  <a:srgbClr val="1A1A1A"/>
+                </a:solidFill>
+                <a:latin typeface="Calibri"/>
+              </a:rPr>
+              <a:t>Asset classes</a:t>
+            </a:r>
+          </a:p>
+          <a:p>
+            <a:r>
+              <a:rPr lang="en-US" dirty="0" sz="1100">
+                <a:solidFill>
+                  <a:srgbClr val="16A34A"/>
+                </a:solidFill>
+                <a:latin typeface="Calibri"/>
+              </a:rPr>
+              <a:t>✓  </a:t>
+            </a:r>
+            <a:r>
+              <a:rPr lang="en-US" dirty="0" sz="1100">
+                <a:solidFill>
+                  <a:srgbClr val="1A1A1A"/>
+                </a:solidFill>
+                <a:latin typeface="Calibri"/>
+              </a:rPr>
+              <a:t>Lifecycle states</a:t>
+            </a:r>
+          </a:p>
+          <a:p>
+            <a:r>
+              <a:rPr lang="en-US" dirty="0" sz="1100">
+                <a:solidFill>
+                  <a:srgbClr val="16A34A"/>
+                </a:solidFill>
+                <a:latin typeface="Calibri"/>
+              </a:rPr>
+              <a:t>✓  </a:t>
+            </a:r>
+            <a:r>
+              <a:rPr lang="en-US" dirty="0" sz="1100">
+                <a:solidFill>
+                  <a:srgbClr val="1A1A1A"/>
+                </a:solidFill>
+                <a:latin typeface="Calibri"/>
+              </a:rPr>
+              <a:t>Stockrooms</a:t>
+            </a:r>
+          </a:p>
+          <a:p>
+            <a:r>
+              <a:rPr lang="en-US" dirty="0" sz="1100">
+                <a:solidFill>
+                  <a:srgbClr val="16A34A"/>
+                </a:solidFill>
+                <a:latin typeface="Calibri"/>
+              </a:rPr>
+              <a:t>✓  </a:t>
+            </a:r>
+            <a:r>
+              <a:rPr lang="en-US" dirty="0" sz="1100">
+                <a:solidFill>
+                  <a:srgbClr val="1A1A1A"/>
+                </a:solidFill>
+                <a:latin typeface="Calibri"/>
+              </a:rPr>
+              <a:t>Disposal vendors</a:t>
+            </a:r>
+          </a:p>
+          <a:p>
+            <a:r>
+              <a:rPr lang="en-US" dirty="0" sz="1100">
+                <a:solidFill>
+                  <a:srgbClr val="16A34A"/>
+                </a:solidFill>
+                <a:latin typeface="Calibri"/>
+              </a:rPr>
+              <a:t>✓  </a:t>
+            </a:r>
+            <a:r>
+              <a:rPr lang="en-US" dirty="0" sz="1100">
+                <a:solidFill>
+                  <a:srgbClr val="1A1A1A"/>
+                </a:solidFill>
+                <a:latin typeface="Calibri"/>
+              </a:rPr>
+              <a:t>Contract association</a:t>
+            </a:r>
+          </a:p>
+          <a:p>
+            <a:r>
+              <a:rPr lang="en-US" dirty="0" sz="1100">
+                <a:solidFill>
+                  <a:srgbClr val="16A34A"/>
+                </a:solidFill>
+                <a:latin typeface="Calibri"/>
+              </a:rPr>
+              <a:t>✓  </a:t>
+            </a:r>
+            <a:r>
+              <a:rPr lang="en-US" dirty="0" sz="1100">
+                <a:solidFill>
+                  <a:srgbClr val="1A1A1A"/>
+                </a:solidFill>
+                <a:latin typeface="Calibri"/>
+              </a:rPr>
+              <a:t>Procurement integration</a:t>
+            </a:r>
+          </a:p>
+          <a:p>
+            <a:r>
+              <a:rPr lang="en-US" dirty="0" sz="1100">
+                <a:solidFill>
+                  <a:srgbClr val="16A34A"/>
+                </a:solidFill>
+                <a:latin typeface="Calibri"/>
+              </a:rPr>
+              <a:t>✓  </a:t>
+            </a:r>
+            <a:r>
+              <a:rPr lang="en-US" dirty="0" sz="1100">
+                <a:solidFill>
+                  <a:srgbClr val="1A1A1A"/>
+                </a:solidFill>
+                <a:latin typeface="Calibri"/>
+              </a:rPr>
+              <a:t>HAM Pro activation</a:t>
+            </a:r>
           </a:p>
         </p:txBody>
       </p:sp>
@@ -13442,6 +13462,10 @@
             <a:prstDash val="solid"/>
           </a:ln>
         </p:spPr>
+        <p:txBody>
+          <a:bodyPr/>
+          <a:p/>
+        </p:txBody>
       </p:sp>
       <p:sp>
         <p:nvSpPr>
@@ -13503,6 +13527,10 @@
             <a:prstDash val="solid"/>
           </a:ln>
         </p:spPr>
+        <p:txBody>
+          <a:bodyPr/>
+          <a:p/>
+        </p:txBody>
       </p:sp>
       <p:sp>
         <p:nvSpPr>
@@ -13525,106 +13553,64 @@
           <a:bodyPr wrap="square" rtlCol="0" anchor="t"/>
           <a:lstStyle/>
           <a:p>
-            <a:pPr indent="0" marL="0">
-              <a:buNone/>
-            </a:pPr>
-            <a:r>
-              <a:rPr lang="en-US" sz="1100" dirty="0">
-                <a:solidFill>
-                  <a:srgbClr val="334155"/>
-                </a:solidFill>
-                <a:latin typeface="Calibri" pitchFamily="34" charset="0"/>
-                <a:ea typeface="Calibri" pitchFamily="34" charset="-122"/>
-                <a:cs typeface="Calibri" pitchFamily="34" charset="-120"/>
-              </a:rPr>
-              <a:t>✗  Adding new fields to OOTB tables</a:t>
-            </a:r>
-            <a:endParaRPr lang="en-US" sz="1100" dirty="0"/>
-          </a:p>
-          <a:p>
-            <a:pPr indent="0" marL="0">
-              <a:buNone/>
-            </a:pPr>
-            <a:r>
-              <a:rPr lang="en-US" sz="1100" dirty="0">
-                <a:solidFill>
-                  <a:srgbClr val="334155"/>
-                </a:solidFill>
-                <a:latin typeface="Calibri" pitchFamily="34" charset="0"/>
-                <a:ea typeface="Calibri" pitchFamily="34" charset="-122"/>
-                <a:cs typeface="Calibri" pitchFamily="34" charset="-120"/>
-              </a:rPr>
-              <a:t>✗  Writing custom business rules or script actions</a:t>
-            </a:r>
-            <a:endParaRPr lang="en-US" sz="1100" dirty="0"/>
-          </a:p>
-          <a:p>
-            <a:pPr indent="0" marL="0">
-              <a:buNone/>
-            </a:pPr>
-            <a:r>
-              <a:rPr lang="en-US" sz="1100" dirty="0">
-                <a:solidFill>
-                  <a:srgbClr val="334155"/>
-                </a:solidFill>
-                <a:latin typeface="Calibri" pitchFamily="34" charset="0"/>
-                <a:ea typeface="Calibri" pitchFamily="34" charset="-122"/>
-                <a:cs typeface="Calibri" pitchFamily="34" charset="-120"/>
-              </a:rPr>
-              <a:t>✗  Creating non-standard CI classes or table extensions</a:t>
-            </a:r>
-            <a:endParaRPr lang="en-US" sz="1100" dirty="0"/>
-          </a:p>
-          <a:p>
-            <a:pPr indent="0" marL="0">
-              <a:buNone/>
-            </a:pPr>
-            <a:r>
-              <a:rPr lang="en-US" sz="1100" dirty="0">
-                <a:solidFill>
-                  <a:srgbClr val="334155"/>
-                </a:solidFill>
-                <a:latin typeface="Calibri" pitchFamily="34" charset="0"/>
-                <a:ea typeface="Calibri" pitchFamily="34" charset="-122"/>
-                <a:cs typeface="Calibri" pitchFamily="34" charset="-120"/>
-              </a:rPr>
-              <a:t>✗  Modifying OOTB workflow stages in code</a:t>
-            </a:r>
-            <a:endParaRPr lang="en-US" sz="1100" dirty="0"/>
-          </a:p>
-          <a:p>
-            <a:pPr indent="0" marL="0">
-              <a:buNone/>
-            </a:pPr>
-            <a:r>
-              <a:rPr lang="en-US" sz="1100" dirty="0">
-                <a:solidFill>
-                  <a:srgbClr val="334155"/>
-                </a:solidFill>
-                <a:latin typeface="Calibri" pitchFamily="34" charset="0"/>
-                <a:ea typeface="Calibri" pitchFamily="34" charset="-122"/>
-                <a:cs typeface="Calibri" pitchFamily="34" charset="-120"/>
-              </a:rPr>
-              <a:t>✗  Building custom client scripts or UI policies</a:t>
-            </a:r>
-            <a:endParaRPr lang="en-US" sz="1100" dirty="0"/>
-          </a:p>
-          <a:p>
-            <a:pPr indent="0" marL="0">
-              <a:buNone/>
-            </a:pPr>
-            <a:r>
-              <a:rPr lang="en-US" sz="1100" dirty="0">
-                <a:solidFill>
-                  <a:srgbClr val="334155"/>
-                </a:solidFill>
-                <a:latin typeface="Calibri" pitchFamily="34" charset="0"/>
-                <a:ea typeface="Calibri" pitchFamily="34" charset="-122"/>
-                <a:cs typeface="Calibri" pitchFamily="34" charset="-120"/>
-              </a:rPr>
-              <a:t>✗  Creating custom REST endpoints outside the catalog</a:t>
-            </a:r>
-            <a:endParaRPr lang="en-US" sz="1100" dirty="0"/>
+            <a:r>
+              <a:rPr lang="en-US" dirty="0" sz="1100">
+                <a:solidFill>
+                  <a:srgbClr val="B91C1C"/>
+                </a:solidFill>
+                <a:latin typeface="Calibri"/>
+              </a:rPr>
+              <a:t>✗  </a:t>
+            </a:r>
+            <a:r>
+              <a:rPr lang="en-US" dirty="0" sz="1100">
+                <a:solidFill>
+                  <a:srgbClr val="1A1A1A"/>
+                </a:solidFill>
+                <a:latin typeface="Calibri"/>
+              </a:rPr>
+              <a:t>Custom asset tables</a:t>
+            </a:r>
+          </a:p>
+          <a:p>
+            <a:r>
+              <a:rPr lang="en-US" dirty="0" sz="1100">
+                <a:solidFill>
+                  <a:srgbClr val="B91C1C"/>
+                </a:solidFill>
+                <a:latin typeface="Calibri"/>
+              </a:rPr>
+              <a:t>✗  </a:t>
+            </a:r>
+            <a:r>
+              <a:rPr lang="en-US" dirty="0" sz="1100">
+                <a:solidFill>
+                  <a:srgbClr val="1A1A1A"/>
+                </a:solidFill>
+                <a:latin typeface="Calibri"/>
+              </a:rPr>
+              <a:t>Scripted lifecycle transitions</a:t>
+            </a:r>
+          </a:p>
+          <a:p>
+            <a:r>
+              <a:rPr lang="en-US" dirty="0" sz="1100">
+                <a:solidFill>
+                  <a:srgbClr val="B91C1C"/>
+                </a:solidFill>
+                <a:latin typeface="Calibri"/>
+              </a:rPr>
+              <a:t>✗  </a:t>
+            </a:r>
+            <a:r>
+              <a:rPr lang="en-US" dirty="0" sz="1100">
+                <a:solidFill>
+                  <a:srgbClr val="1A1A1A"/>
+                </a:solidFill>
+                <a:latin typeface="Calibri"/>
+              </a:rPr>
+              <a:t>Custom procurement connectors outside OOTB PO integration</a:t>
+            </a:r>
           </a:p>
         </p:txBody>
       </p:sp>
@@ -13652,6 +13638,10 @@
             <a:prstDash val="solid"/>
           </a:ln>
         </p:spPr>
+        <p:txBody>
+          <a:bodyPr/>
+          <a:p/>
+        </p:txBody>
       </p:sp>
       <p:sp>
         <p:nvSpPr>
